--- a/index/designs/y8-l8/l7-characters/l7-characters.pptx
+++ b/index/designs/y8-l8/l7-characters/l7-characters.pptx
@@ -2701,12 +2701,6 @@
               </a:rPr>
               <a:t>You're given base characters: </a:t>
             </a:r>
-            <a:pPr algn="l" indent="0" marL="0">
-              <a:spcAft>
-                <a:spcPts val="600"/>
-              </a:spcAft>
-              <a:buNone/>
-            </a:pPr>
             <a:r>
               <a:rPr lang="en-US" sz="1100" b="1" dirty="0">
                 <a:solidFill>
@@ -2739,12 +2733,6 @@
               </a:rPr>
               <a:t>Add the correct character to </a:t>
             </a:r>
-            <a:pPr algn="l" indent="0" marL="0">
-              <a:spcAft>
-                <a:spcPts val="600"/>
-              </a:spcAft>
-              <a:buNone/>
-            </a:pPr>
             <a:r>
               <a:rPr lang="en-US" sz="1100" b="1" dirty="0">
                 <a:solidFill>
@@ -2777,12 +2765,6 @@
               </a:rPr>
               <a:t>Write the </a:t>
             </a:r>
-            <a:pPr algn="l" indent="0" marL="0">
-              <a:spcAft>
-                <a:spcPts val="600"/>
-              </a:spcAft>
-              <a:buNone/>
-            </a:pPr>
             <a:r>
               <a:rPr lang="en-US" sz="1100" b="1" dirty="0">
                 <a:solidFill>
@@ -2794,12 +2776,6 @@
               </a:rPr>
               <a:t>full word</a:t>
             </a:r>
-            <a:pPr algn="l" indent="0" marL="0">
-              <a:spcAft>
-                <a:spcPts val="600"/>
-              </a:spcAft>
-              <a:buNone/>
-            </a:pPr>
             <a:r>
               <a:rPr lang="en-US" sz="1100" dirty="0">
                 <a:solidFill>
@@ -2924,9 +2900,6 @@
               </a:rPr>
               <a:t>篮___ </a:t>
             </a:r>
-            <a:pPr algn="l" indent="0" marL="0">
-              <a:buNone/>
-            </a:pPr>
             <a:r>
               <a:rPr lang="en-US" sz="1500" b="1" dirty="0">
                 <a:solidFill>
@@ -2938,9 +2911,6 @@
               </a:rPr>
               <a:t>→</a:t>
             </a:r>
-            <a:pPr algn="l" indent="0" marL="0">
-              <a:buNone/>
-            </a:pPr>
             <a:r>
               <a:rPr lang="en-US" sz="1500" dirty="0">
                 <a:solidFill>
@@ -2991,9 +2961,6 @@
               </a:rPr>
               <a:t>___视 </a:t>
             </a:r>
-            <a:pPr algn="l" indent="0" marL="0">
-              <a:buNone/>
-            </a:pPr>
             <a:r>
               <a:rPr lang="en-US" sz="1500" b="1" dirty="0">
                 <a:solidFill>
@@ -3005,9 +2972,6 @@
               </a:rPr>
               <a:t>→</a:t>
             </a:r>
-            <a:pPr algn="l" indent="0" marL="0">
-              <a:buNone/>
-            </a:pPr>
             <a:r>
               <a:rPr lang="en-US" sz="1500" dirty="0">
                 <a:solidFill>
@@ -4002,9 +3966,6 @@
               </a:rPr>
               <a:t>Teacher calls: </a:t>
             </a:r>
-            <a:pPr algn="l" indent="0" marL="0">
-              <a:buNone/>
-            </a:pPr>
             <a:r>
               <a:rPr lang="en-US" sz="1000" b="1" dirty="0">
                 <a:solidFill>
@@ -4016,9 +3977,6 @@
               </a:rPr>
               <a:t>夕</a:t>
             </a:r>
-            <a:pPr algn="l" indent="0" marL="0">
-              <a:buNone/>
-            </a:pPr>
             <a:r>
               <a:rPr lang="en-US" sz="1000" dirty="0">
                 <a:solidFill>
@@ -4289,9 +4247,6 @@
               </a:rPr>
               <a:t>Teacher calls: </a:t>
             </a:r>
-            <a:pPr algn="l" indent="0" marL="0">
-              <a:buNone/>
-            </a:pPr>
             <a:r>
               <a:rPr lang="en-US" sz="1000" b="1" dirty="0">
                 <a:solidFill>
@@ -4303,9 +4258,6 @@
               </a:rPr>
               <a:t>心</a:t>
             </a:r>
-            <a:pPr algn="l" indent="0" marL="0">
-              <a:buNone/>
-            </a:pPr>
             <a:r>
               <a:rPr lang="en-US" sz="1000" dirty="0">
                 <a:solidFill>
@@ -4576,9 +4528,6 @@
               </a:rPr>
               <a:t>Teacher calls: </a:t>
             </a:r>
-            <a:pPr algn="l" indent="0" marL="0">
-              <a:buNone/>
-            </a:pPr>
             <a:r>
               <a:rPr lang="en-US" sz="1000" b="1" dirty="0">
                 <a:solidFill>
@@ -4590,9 +4539,6 @@
               </a:rPr>
               <a:t>目</a:t>
             </a:r>
-            <a:pPr algn="l" indent="0" marL="0">
-              <a:buNone/>
-            </a:pPr>
             <a:r>
               <a:rPr lang="en-US" sz="1000" dirty="0">
                 <a:solidFill>
@@ -4863,9 +4809,6 @@
               </a:rPr>
               <a:t>Teacher calls: </a:t>
             </a:r>
-            <a:pPr algn="l" indent="0" marL="0">
-              <a:buNone/>
-            </a:pPr>
             <a:r>
               <a:rPr lang="en-US" sz="1000" b="1" dirty="0">
                 <a:solidFill>
@@ -4877,9 +4820,6 @@
               </a:rPr>
               <a:t>方</a:t>
             </a:r>
-            <a:pPr algn="l" indent="0" marL="0">
-              <a:buNone/>
-            </a:pPr>
             <a:r>
               <a:rPr lang="en-US" sz="1000" dirty="0">
                 <a:solidFill>
@@ -5833,12 +5773,6 @@
               </a:rPr>
               <a:t>In pairs, interview your partner across the </a:t>
             </a:r>
-            <a:pPr algn="l" indent="0" marL="0">
-              <a:spcAft>
-                <a:spcPts val="600"/>
-              </a:spcAft>
-              <a:buNone/>
-            </a:pPr>
             <a:r>
               <a:rPr lang="en-US" sz="1100" b="1" dirty="0">
                 <a:solidFill>
@@ -5871,12 +5805,6 @@
               </a:rPr>
               <a:t>Ask about their </a:t>
             </a:r>
-            <a:pPr algn="l" indent="0" marL="0">
-              <a:spcAft>
-                <a:spcPts val="600"/>
-              </a:spcAft>
-              <a:buNone/>
-            </a:pPr>
             <a:r>
               <a:rPr lang="en-US" sz="1100" b="1" dirty="0">
                 <a:solidFill>
@@ -5888,12 +5816,6 @@
               </a:rPr>
               <a:t>sports, TV, and movie</a:t>
             </a:r>
-            <a:pPr algn="l" indent="0" marL="0">
-              <a:spcAft>
-                <a:spcPts val="600"/>
-              </a:spcAft>
-              <a:buNone/>
-            </a:pPr>
             <a:r>
               <a:rPr lang="en-US" sz="1100" dirty="0">
                 <a:solidFill>
@@ -5926,12 +5848,6 @@
               </a:rPr>
               <a:t>Mark each item with a response option — </a:t>
             </a:r>
-            <a:pPr algn="l" indent="0" marL="0">
-              <a:spcAft>
-                <a:spcPts val="600"/>
-              </a:spcAft>
-              <a:buNone/>
-            </a:pPr>
             <a:r>
               <a:rPr lang="en-US" sz="1100" b="1" dirty="0">
                 <a:solidFill>
@@ -6056,9 +5972,6 @@
               </a:rPr>
               <a:t>很喜欢 </a:t>
             </a:r>
-            <a:pPr algn="l" indent="0" marL="0">
-              <a:buNone/>
-            </a:pPr>
             <a:r>
               <a:rPr lang="en-US" sz="900" dirty="0">
                 <a:solidFill>
@@ -6109,9 +6022,6 @@
               </a:rPr>
               <a:t>喜欢 </a:t>
             </a:r>
-            <a:pPr algn="l" indent="0" marL="0">
-              <a:buNone/>
-            </a:pPr>
             <a:r>
               <a:rPr lang="en-US" sz="900" dirty="0">
                 <a:solidFill>
@@ -6162,9 +6072,6 @@
               </a:rPr>
               <a:t>不太喜欢 </a:t>
             </a:r>
-            <a:pPr algn="l" indent="0" marL="0">
-              <a:buNone/>
-            </a:pPr>
             <a:r>
               <a:rPr lang="en-US" sz="900" dirty="0">
                 <a:solidFill>
@@ -6215,9 +6122,6 @@
               </a:rPr>
               <a:t>不喜欢 </a:t>
             </a:r>
-            <a:pPr algn="l" indent="0" marL="0">
-              <a:buNone/>
-            </a:pPr>
             <a:r>
               <a:rPr lang="en-US" sz="900" dirty="0">
                 <a:solidFill>
@@ -6970,12 +6874,6 @@
               </a:rPr>
               <a:t>Write 夕心目方 with correct stroke order </a:t>
             </a:r>
-            <a:pPr algn="l" indent="0" marL="0">
-              <a:spcAft>
-                <a:spcPts val="500"/>
-              </a:spcAft>
-              <a:buNone/>
-            </a:pPr>
             <a:r>
               <a:rPr lang="en-US" sz="1100" dirty="0">
                 <a:solidFill>
@@ -7008,12 +6906,6 @@
               </a:rPr>
               <a:t>Recognise these 4 characters inside other words </a:t>
             </a:r>
-            <a:pPr algn="l" indent="0" marL="0">
-              <a:spcAft>
-                <a:spcPts val="500"/>
-              </a:spcAft>
-              <a:buNone/>
-            </a:pPr>
             <a:r>
               <a:rPr lang="en-US" sz="1100" dirty="0">
                 <a:solidFill>
@@ -7046,12 +6938,6 @@
               </a:rPr>
               <a:t>Build a sport word with a shared base (e.g. ___球) </a:t>
             </a:r>
-            <a:pPr algn="l" indent="0" marL="0">
-              <a:spcAft>
-                <a:spcPts val="500"/>
-              </a:spcAft>
-              <a:buNone/>
-            </a:pPr>
             <a:r>
               <a:rPr lang="en-US" sz="1100" dirty="0">
                 <a:solidFill>
@@ -7312,9 +7198,6 @@
               </a:rPr>
               <a:t>Mini whiteboards: </a:t>
             </a:r>
-            <a:pPr algn="l" indent="0" marL="0">
-              <a:buNone/>
-            </a:pPr>
             <a:r>
               <a:rPr lang="en-US" sz="1000" b="1" dirty="0">
                 <a:solidFill>
@@ -7326,9 +7209,6 @@
               </a:rPr>
               <a:t>👍 😐 👎</a:t>
             </a:r>
-            <a:pPr algn="l" indent="0" marL="0">
-              <a:buNone/>
-            </a:pPr>
             <a:r>
               <a:rPr lang="en-US" sz="1000" dirty="0">
                 <a:solidFill>
@@ -8586,12 +8466,6 @@
               </a:rPr>
               <a:t>Teacher writes </a:t>
             </a:r>
-            <a:pPr algn="l" indent="0" marL="0">
-              <a:spcAft>
-                <a:spcPts val="500"/>
-              </a:spcAft>
-              <a:buNone/>
-            </a:pPr>
             <a:r>
               <a:rPr lang="en-US" sz="1100" b="1" dirty="0">
                 <a:solidFill>
@@ -8603,12 +8477,6 @@
               </a:rPr>
               <a:t>2 sentences</a:t>
             </a:r>
-            <a:pPr algn="l" indent="0" marL="0">
-              <a:spcAft>
-                <a:spcPts val="500"/>
-              </a:spcAft>
-              <a:buNone/>
-            </a:pPr>
             <a:r>
               <a:rPr lang="en-US" sz="1100" dirty="0">
                 <a:solidFill>
@@ -8641,12 +8509,6 @@
               </a:rPr>
               <a:t>Students </a:t>
             </a:r>
-            <a:pPr algn="l" indent="0" marL="0">
-              <a:spcAft>
-                <a:spcPts val="500"/>
-              </a:spcAft>
-              <a:buNone/>
-            </a:pPr>
             <a:r>
               <a:rPr lang="en-US" sz="1100" b="1" dirty="0">
                 <a:solidFill>
@@ -8658,12 +8520,6 @@
               </a:rPr>
               <a:t>find and fix</a:t>
             </a:r>
-            <a:pPr algn="l" indent="0" marL="0">
-              <a:spcAft>
-                <a:spcPts val="500"/>
-              </a:spcAft>
-              <a:buNone/>
-            </a:pPr>
             <a:r>
               <a:rPr lang="en-US" sz="1100" dirty="0">
                 <a:solidFill>
@@ -9039,9 +8895,6 @@
               </a:rPr>
               <a:t>"You've done a lot of speaking and grammar work this unit. Today we slow down and focus on </a:t>
             </a:r>
-            <a:pPr algn="l" indent="0" marL="0">
-              <a:buNone/>
-            </a:pPr>
             <a:r>
               <a:rPr lang="en-US" sz="1100" b="1" dirty="0">
                 <a:solidFill>
@@ -9053,9 +8906,6 @@
               </a:rPr>
               <a:t>writing</a:t>
             </a:r>
-            <a:pPr algn="l" indent="0" marL="0">
-              <a:buNone/>
-            </a:pPr>
             <a:r>
               <a:rPr lang="en-US" sz="1100" dirty="0">
                 <a:solidFill>
@@ -9451,12 +9301,6 @@
               </a:rPr>
               <a:t>We are learning to </a:t>
             </a:r>
-            <a:pPr algn="l" indent="0" marL="0">
-              <a:spcBef>
-                <a:spcPts val="400"/>
-              </a:spcBef>
-              <a:buNone/>
-            </a:pPr>
             <a:r>
               <a:rPr lang="en-US" sz="1400" b="1" dirty="0">
                 <a:solidFill>
@@ -9468,12 +9312,6 @@
               </a:rPr>
               <a:t>write four new simple characters</a:t>
             </a:r>
-            <a:pPr algn="l" indent="0" marL="0">
-              <a:spcBef>
-                <a:spcPts val="400"/>
-              </a:spcBef>
-              <a:buNone/>
-            </a:pPr>
             <a:r>
               <a:rPr lang="en-US" sz="1400" dirty="0">
                 <a:solidFill>
@@ -9595,9 +9433,6 @@
               </a:rPr>
               <a:t>I can write </a:t>
             </a:r>
-            <a:pPr algn="l" indent="0" marL="0">
-              <a:buNone/>
-            </a:pPr>
             <a:r>
               <a:rPr lang="en-US" sz="1200" dirty="0">
                 <a:solidFill>
@@ -9609,9 +9444,6 @@
               </a:rPr>
               <a:t>夕, 心, 目, 方</a:t>
             </a:r>
-            <a:pPr algn="l" indent="0" marL="0">
-              <a:buNone/>
-            </a:pPr>
             <a:r>
               <a:rPr lang="en-US" sz="1200" dirty="0">
                 <a:solidFill>
@@ -9623,9 +9455,6 @@
               </a:rPr>
               <a:t> with </a:t>
             </a:r>
-            <a:pPr algn="l" indent="0" marL="0">
-              <a:buNone/>
-            </a:pPr>
             <a:r>
               <a:rPr lang="en-US" sz="1200" b="1" dirty="0">
                 <a:solidFill>
@@ -9747,9 +9576,6 @@
               </a:rPr>
               <a:t>I can </a:t>
             </a:r>
-            <a:pPr algn="l" indent="0" marL="0">
-              <a:buNone/>
-            </a:pPr>
             <a:r>
               <a:rPr lang="en-US" sz="1200" b="1" dirty="0">
                 <a:solidFill>
@@ -9761,9 +9587,6 @@
               </a:rPr>
               <a:t>recognise</a:t>
             </a:r>
-            <a:pPr algn="l" indent="0" marL="0">
-              <a:buNone/>
-            </a:pPr>
             <a:r>
               <a:rPr lang="en-US" sz="1200" dirty="0">
                 <a:solidFill>
@@ -9885,9 +9708,6 @@
               </a:rPr>
               <a:t>I can </a:t>
             </a:r>
-            <a:pPr algn="l" indent="0" marL="0">
-              <a:buNone/>
-            </a:pPr>
             <a:r>
               <a:rPr lang="en-US" sz="1200" b="1" dirty="0">
                 <a:solidFill>
@@ -9899,9 +9719,6 @@
               </a:rPr>
               <a:t>build a sport word</a:t>
             </a:r>
-            <a:pPr algn="l" indent="0" marL="0">
-              <a:buNone/>
-            </a:pPr>
             <a:r>
               <a:rPr lang="en-US" sz="1200" dirty="0">
                 <a:solidFill>
@@ -9913,9 +9730,6 @@
               </a:rPr>
               <a:t> by adding a character to a shared base </a:t>
             </a:r>
-            <a:pPr algn="l" indent="0" marL="0">
-              <a:buNone/>
-            </a:pPr>
             <a:r>
               <a:rPr lang="en-US" sz="1200" dirty="0">
                 <a:solidFill>
@@ -11470,9 +11284,6 @@
               </a:rPr>
               <a:t>夕</a:t>
             </a:r>
-            <a:pPr algn="l" indent="0" marL="0">
-              <a:buNone/>
-            </a:pPr>
             <a:r>
               <a:rPr lang="en-US" sz="1200" dirty="0">
                 <a:solidFill>
@@ -11484,9 +11295,6 @@
               </a:rPr>
               <a:t> </a:t>
             </a:r>
-            <a:pPr algn="l" indent="0" marL="0">
-              <a:buNone/>
-            </a:pPr>
             <a:r>
               <a:rPr lang="en-US" sz="1200" dirty="0">
                 <a:solidFill>
@@ -11498,9 +11306,6 @@
               </a:rPr>
               <a:t>xī</a:t>
             </a:r>
-            <a:pPr algn="l" indent="0" marL="0">
-              <a:buNone/>
-            </a:pPr>
             <a:r>
               <a:rPr lang="en-US" sz="1200" dirty="0">
                 <a:solidFill>
@@ -11512,9 +11317,6 @@
               </a:rPr>
               <a:t> — </a:t>
             </a:r>
-            <a:pPr algn="l" indent="0" marL="0">
-              <a:buNone/>
-            </a:pPr>
             <a:r>
               <a:rPr lang="en-US" sz="1200" b="1" dirty="0">
                 <a:solidFill>
@@ -11526,9 +11328,6 @@
               </a:rPr>
               <a:t>Stroke order:</a:t>
             </a:r>
-            <a:pPr algn="l" indent="0" marL="0">
-              <a:buNone/>
-            </a:pPr>
             <a:r>
               <a:rPr lang="en-US" sz="1200" dirty="0">
                 <a:solidFill>
@@ -11540,9 +11339,6 @@
               </a:rPr>
               <a:t> ① 丿(slanting stroke) → ② 横撇/横钩 → ③ 丿(final stroke, completes 夕) </a:t>
             </a:r>
-            <a:pPr algn="l" indent="0" marL="0">
-              <a:buNone/>
-            </a:pPr>
             <a:r>
               <a:rPr lang="en-US" sz="1200" dirty="0">
                 <a:solidFill>
@@ -11629,9 +11425,6 @@
               </a:rPr>
               <a:t>心</a:t>
             </a:r>
-            <a:pPr algn="l" indent="0" marL="0">
-              <a:buNone/>
-            </a:pPr>
             <a:r>
               <a:rPr lang="en-US" sz="1200" dirty="0">
                 <a:solidFill>
@@ -11643,9 +11436,6 @@
               </a:rPr>
               <a:t> </a:t>
             </a:r>
-            <a:pPr algn="l" indent="0" marL="0">
-              <a:buNone/>
-            </a:pPr>
             <a:r>
               <a:rPr lang="en-US" sz="1200" dirty="0">
                 <a:solidFill>
@@ -11657,9 +11447,6 @@
               </a:rPr>
               <a:t>xīn</a:t>
             </a:r>
-            <a:pPr algn="l" indent="0" marL="0">
-              <a:buNone/>
-            </a:pPr>
             <a:r>
               <a:rPr lang="en-US" sz="1200" dirty="0">
                 <a:solidFill>
@@ -11671,9 +11458,6 @@
               </a:rPr>
               <a:t> — </a:t>
             </a:r>
-            <a:pPr algn="l" indent="0" marL="0">
-              <a:buNone/>
-            </a:pPr>
             <a:r>
               <a:rPr lang="en-US" sz="1200" b="1" dirty="0">
                 <a:solidFill>
@@ -11685,9 +11469,6 @@
               </a:rPr>
               <a:t>Stroke order:</a:t>
             </a:r>
-            <a:pPr algn="l" indent="0" marL="0">
-              <a:buNone/>
-            </a:pPr>
             <a:r>
               <a:rPr lang="en-US" sz="1200" dirty="0">
                 <a:solidFill>
@@ -11699,9 +11480,6 @@
               </a:rPr>
               <a:t> ① 点 (dot, left) → ② 卧钩 (lying hook) → ③ 点 (dot, middle) → ④ 点 (dot, right) </a:t>
             </a:r>
-            <a:pPr algn="l" indent="0" marL="0">
-              <a:buNone/>
-            </a:pPr>
             <a:r>
               <a:rPr lang="en-US" sz="1200" dirty="0">
                 <a:solidFill>
@@ -11788,9 +11566,6 @@
               </a:rPr>
               <a:t>目</a:t>
             </a:r>
-            <a:pPr algn="l" indent="0" marL="0">
-              <a:buNone/>
-            </a:pPr>
             <a:r>
               <a:rPr lang="en-US" sz="1200" dirty="0">
                 <a:solidFill>
@@ -11802,9 +11577,6 @@
               </a:rPr>
               <a:t> </a:t>
             </a:r>
-            <a:pPr algn="l" indent="0" marL="0">
-              <a:buNone/>
-            </a:pPr>
             <a:r>
               <a:rPr lang="en-US" sz="1200" dirty="0">
                 <a:solidFill>
@@ -11816,9 +11588,6 @@
               </a:rPr>
               <a:t>mù</a:t>
             </a:r>
-            <a:pPr algn="l" indent="0" marL="0">
-              <a:buNone/>
-            </a:pPr>
             <a:r>
               <a:rPr lang="en-US" sz="1200" dirty="0">
                 <a:solidFill>
@@ -11830,9 +11599,6 @@
               </a:rPr>
               <a:t> — </a:t>
             </a:r>
-            <a:pPr algn="l" indent="0" marL="0">
-              <a:buNone/>
-            </a:pPr>
             <a:r>
               <a:rPr lang="en-US" sz="1200" b="1" dirty="0">
                 <a:solidFill>
@@ -11844,9 +11610,6 @@
               </a:rPr>
               <a:t>Stroke order:</a:t>
             </a:r>
-            <a:pPr algn="l" indent="0" marL="0">
-              <a:buNone/>
-            </a:pPr>
             <a:r>
               <a:rPr lang="en-US" sz="1200" dirty="0">
                 <a:solidFill>
@@ -11858,9 +11621,6 @@
               </a:rPr>
               <a:t> ① 竖 (vertical, left) → ② 横折 (horizontal-turn, top+right) → ③–④ 横 (two inner horizontals) → ⑤ 横 (bottom horizontal, closes box) </a:t>
             </a:r>
-            <a:pPr algn="l" indent="0" marL="0">
-              <a:buNone/>
-            </a:pPr>
             <a:r>
               <a:rPr lang="en-US" sz="1200" dirty="0">
                 <a:solidFill>
@@ -11947,9 +11707,6 @@
               </a:rPr>
               <a:t>方</a:t>
             </a:r>
-            <a:pPr algn="l" indent="0" marL="0">
-              <a:buNone/>
-            </a:pPr>
             <a:r>
               <a:rPr lang="en-US" sz="1200" dirty="0">
                 <a:solidFill>
@@ -11961,9 +11718,6 @@
               </a:rPr>
               <a:t> </a:t>
             </a:r>
-            <a:pPr algn="l" indent="0" marL="0">
-              <a:buNone/>
-            </a:pPr>
             <a:r>
               <a:rPr lang="en-US" sz="1200" dirty="0">
                 <a:solidFill>
@@ -11975,9 +11729,6 @@
               </a:rPr>
               <a:t>fāng</a:t>
             </a:r>
-            <a:pPr algn="l" indent="0" marL="0">
-              <a:buNone/>
-            </a:pPr>
             <a:r>
               <a:rPr lang="en-US" sz="1200" dirty="0">
                 <a:solidFill>
@@ -11989,9 +11740,6 @@
               </a:rPr>
               <a:t> — </a:t>
             </a:r>
-            <a:pPr algn="l" indent="0" marL="0">
-              <a:buNone/>
-            </a:pPr>
             <a:r>
               <a:rPr lang="en-US" sz="1200" b="1" dirty="0">
                 <a:solidFill>
@@ -12003,9 +11751,6 @@
               </a:rPr>
               <a:t>Stroke order:</a:t>
             </a:r>
-            <a:pPr algn="l" indent="0" marL="0">
-              <a:buNone/>
-            </a:pPr>
             <a:r>
               <a:rPr lang="en-US" sz="1200" dirty="0">
                 <a:solidFill>
@@ -12017,9 +11762,6 @@
               </a:rPr>
               <a:t> ① 点 (dot) → ② 横 (horizontal) → ③ 横折钩 (horizontal-turn-hook) → ④ 撇 (falling stroke) </a:t>
             </a:r>
-            <a:pPr algn="l" indent="0" marL="0">
-              <a:buNone/>
-            </a:pPr>
             <a:r>
               <a:rPr lang="en-US" sz="1200" dirty="0">
                 <a:solidFill>
@@ -12106,9 +11848,6 @@
               </a:rPr>
               <a:t>✏️ Copy each character 3 times — follow stroke order </a:t>
             </a:r>
-            <a:pPr algn="l" indent="0" marL="0">
-              <a:buNone/>
-            </a:pPr>
             <a:r>
               <a:rPr lang="en-US" sz="1100" dirty="0">
                 <a:solidFill>
@@ -12674,9 +12413,6 @@
               </a:rPr>
               <a:t>篮球 </a:t>
             </a:r>
-            <a:pPr algn="l" indent="0" marL="0">
-              <a:buNone/>
-            </a:pPr>
             <a:r>
               <a:rPr lang="en-US" sz="1000" dirty="0">
                 <a:solidFill>
@@ -12802,9 +12538,6 @@
               </a:rPr>
               <a:t>网 + </a:t>
             </a:r>
-            <a:pPr algn="l" indent="0" marL="0">
-              <a:buNone/>
-            </a:pPr>
             <a:r>
               <a:rPr lang="en-US" sz="1500" b="1" dirty="0">
                 <a:solidFill>
@@ -12816,9 +12549,6 @@
               </a:rPr>
               <a:t>球</a:t>
             </a:r>
-            <a:pPr algn="l" indent="0" marL="0">
-              <a:buNone/>
-            </a:pPr>
             <a:r>
               <a:rPr lang="en-US" sz="1500" dirty="0">
                 <a:solidFill>
@@ -12944,9 +12674,6 @@
               </a:rPr>
               <a:t>羽毛 + </a:t>
             </a:r>
-            <a:pPr algn="l" indent="0" marL="0">
-              <a:buNone/>
-            </a:pPr>
             <a:r>
               <a:rPr lang="en-US" sz="1500" b="1" dirty="0">
                 <a:solidFill>
@@ -12958,9 +12685,6 @@
               </a:rPr>
               <a:t>球</a:t>
             </a:r>
-            <a:pPr algn="l" indent="0" marL="0">
-              <a:buNone/>
-            </a:pPr>
             <a:r>
               <a:rPr lang="en-US" sz="1500" dirty="0">
                 <a:solidFill>
@@ -13125,9 +12849,6 @@
               </a:rPr>
               <a:t>电</a:t>
             </a:r>
-            <a:pPr algn="l" indent="0" marL="0">
-              <a:buNone/>
-            </a:pPr>
             <a:r>
               <a:rPr lang="en-US" sz="1500" dirty="0">
                 <a:solidFill>
@@ -13253,9 +12974,6 @@
               </a:rPr>
               <a:t>电</a:t>
             </a:r>
-            <a:pPr algn="l" indent="0" marL="0">
-              <a:buNone/>
-            </a:pPr>
             <a:r>
               <a:rPr lang="en-US" sz="1500" dirty="0">
                 <a:solidFill>
@@ -13813,9 +13531,6 @@
               </a:rPr>
               <a:t>Write </a:t>
             </a:r>
-            <a:pPr algn="l" indent="0" marL="0">
-              <a:buNone/>
-            </a:pPr>
             <a:r>
               <a:rPr lang="en-US" sz="1600" b="1" dirty="0">
                 <a:solidFill>
@@ -13827,9 +13542,6 @@
               </a:rPr>
               <a:t>心</a:t>
             </a:r>
-            <a:pPr algn="l" indent="0" marL="0">
-              <a:buNone/>
-            </a:pPr>
             <a:r>
               <a:rPr lang="en-US" sz="1300" dirty="0">
                 <a:solidFill>
@@ -14032,9 +13744,6 @@
               </a:rPr>
               <a:t>What does </a:t>
             </a:r>
-            <a:pPr algn="l" indent="0" marL="0">
-              <a:buNone/>
-            </a:pPr>
             <a:r>
               <a:rPr lang="en-US" sz="1600" b="1" dirty="0">
                 <a:solidFill>
@@ -14046,9 +13755,6 @@
               </a:rPr>
               <a:t>目</a:t>
             </a:r>
-            <a:pPr algn="l" indent="0" marL="0">
-              <a:buNone/>
-            </a:pPr>
             <a:r>
               <a:rPr lang="en-US" sz="1300" dirty="0">
                 <a:solidFill>
@@ -14251,9 +13957,6 @@
               </a:rPr>
               <a:t>Fill the gap: </a:t>
             </a:r>
-            <a:pPr algn="l" indent="0" marL="0">
-              <a:buNone/>
-            </a:pPr>
             <a:r>
               <a:rPr lang="en-US" sz="1500" b="1" dirty="0">
                 <a:solidFill>
@@ -14265,9 +13968,6 @@
               </a:rPr>
               <a:t>羽毛___</a:t>
             </a:r>
-            <a:pPr algn="l" indent="0" marL="0">
-              <a:buNone/>
-            </a:pPr>
             <a:r>
               <a:rPr lang="en-US" sz="1300" dirty="0">
                 <a:solidFill>
@@ -15769,9 +15469,6 @@
               </a:rPr>
               <a:t>夕</a:t>
             </a:r>
-            <a:pPr algn="l" indent="0" marL="0">
-              <a:buNone/>
-            </a:pPr>
             <a:r>
               <a:rPr lang="en-US" sz="1200" dirty="0">
                 <a:solidFill>
@@ -15800,9 +15497,6 @@
               </a:rPr>
               <a:t>心</a:t>
             </a:r>
-            <a:pPr algn="l" indent="0" marL="0">
-              <a:buNone/>
-            </a:pPr>
             <a:r>
               <a:rPr lang="en-US" sz="1200" dirty="0">
                 <a:solidFill>
@@ -15831,9 +15525,6 @@
               </a:rPr>
               <a:t>目</a:t>
             </a:r>
-            <a:pPr algn="l" indent="0" marL="0">
-              <a:buNone/>
-            </a:pPr>
             <a:r>
               <a:rPr lang="en-US" sz="1200" dirty="0">
                 <a:solidFill>
@@ -15862,9 +15553,6 @@
               </a:rPr>
               <a:t>方</a:t>
             </a:r>
-            <a:pPr algn="l" indent="0" marL="0">
-              <a:buNone/>
-            </a:pPr>
             <a:r>
               <a:rPr lang="en-US" sz="1200" dirty="0">
                 <a:solidFill>
@@ -15997,12 +15685,6 @@
               </a:rPr>
               <a:t>Trace each character on </a:t>
             </a:r>
-            <a:pPr algn="l" indent="0" marL="0">
-              <a:spcAft>
-                <a:spcPts val="600"/>
-              </a:spcAft>
-              <a:buNone/>
-            </a:pPr>
             <a:r>
               <a:rPr lang="en-US" sz="1100" b="1" dirty="0">
                 <a:solidFill>
@@ -16014,12 +15696,6 @@
               </a:rPr>
               <a:t>grid paper</a:t>
             </a:r>
-            <a:pPr algn="l" indent="0" marL="0">
-              <a:spcAft>
-                <a:spcPts val="600"/>
-              </a:spcAft>
-              <a:buNone/>
-            </a:pPr>
             <a:r>
               <a:rPr lang="en-US" sz="1100" dirty="0">
                 <a:solidFill>
@@ -16052,12 +15728,6 @@
               </a:rPr>
               <a:t>Write each character </a:t>
             </a:r>
-            <a:pPr algn="l" indent="0" marL="0">
-              <a:spcAft>
-                <a:spcPts val="600"/>
-              </a:spcAft>
-              <a:buNone/>
-            </a:pPr>
             <a:r>
               <a:rPr lang="en-US" sz="1100" b="1" dirty="0">
                 <a:solidFill>
@@ -16069,12 +15739,6 @@
               </a:rPr>
               <a:t>independently 3 times</a:t>
             </a:r>
-            <a:pPr algn="l" indent="0" marL="0">
-              <a:spcAft>
-                <a:spcPts val="600"/>
-              </a:spcAft>
-              <a:buNone/>
-            </a:pPr>
             <a:r>
               <a:rPr lang="en-US" sz="1100" dirty="0">
                 <a:solidFill>
@@ -16107,12 +15771,6 @@
               </a:rPr>
               <a:t>Check your stroke order against the guide — it </a:t>
             </a:r>
-            <a:pPr algn="l" indent="0" marL="0">
-              <a:spcAft>
-                <a:spcPts val="600"/>
-              </a:spcAft>
-              <a:buNone/>
-            </a:pPr>
             <a:r>
               <a:rPr lang="en-US" sz="1100" b="1" dirty="0">
                 <a:solidFill>
